--- a/reports/BRANCH_KUPANG_PERFORMANCE_SUMMARY_20260826_INARA.pptx
+++ b/reports/BRANCH_KUPANG_PERFORMANCE_SUMMARY_20260826_INARA.pptx
@@ -22131,7 +22131,7 @@
                           </a:solidFill>
                           <a:latin typeface="Arial"/>
                         </a:rPr>
-                        <a:t>640</a:t>
+                        <a:t>667</a:t>
                       </a:r>
                     </a:p>
                   </a:txBody>
@@ -22178,7 +22178,7 @@
                           </a:solidFill>
                           <a:latin typeface="Arial"/>
                         </a:rPr>
-                        <a:t>1.550</a:t>
+                        <a:t>1.564</a:t>
                       </a:r>
                     </a:p>
                   </a:txBody>
@@ -22225,7 +22225,7 @@
                           </a:solidFill>
                           <a:latin typeface="Arial"/>
                         </a:rPr>
-                        <a:t>6.917</a:t>
+                        <a:t>6.876</a:t>
                       </a:r>
                     </a:p>
                   </a:txBody>
@@ -22272,7 +22272,7 @@
                           </a:solidFill>
                           <a:latin typeface="Arial"/>
                         </a:rPr>
-                        <a:t>463</a:t>
+                        <a:t>467</a:t>
                       </a:r>
                     </a:p>
                   </a:txBody>
@@ -22319,7 +22319,7 @@
                           </a:solidFill>
                           <a:latin typeface="Arial"/>
                         </a:rPr>
-                        <a:t>429</a:t>
+                        <a:t>425</a:t>
                       </a:r>
                     </a:p>
                   </a:txBody>
@@ -22415,7 +22415,7 @@
                           </a:solidFill>
                           <a:latin typeface="Arial"/>
                         </a:rPr>
-                        <a:t>6,4%</a:t>
+                        <a:t>6,7%</a:t>
                       </a:r>
                     </a:p>
                   </a:txBody>
@@ -22462,7 +22462,7 @@
                           </a:solidFill>
                           <a:latin typeface="Arial"/>
                         </a:rPr>
-                        <a:t>15,5%</a:t>
+                        <a:t>15,6%</a:t>
                       </a:r>
                     </a:p>
                   </a:txBody>
@@ -22509,7 +22509,7 @@
                           </a:solidFill>
                           <a:latin typeface="Arial"/>
                         </a:rPr>
-                        <a:t>69,2%</a:t>
+                        <a:t>68,8%</a:t>
                       </a:r>
                     </a:p>
                   </a:txBody>
@@ -22556,7 +22556,7 @@
                           </a:solidFill>
                           <a:latin typeface="Arial"/>
                         </a:rPr>
-                        <a:t>4,6%</a:t>
+                        <a:t>4,7%</a:t>
                       </a:r>
                     </a:p>
                   </a:txBody>
@@ -22836,7 +22836,7 @@
                 </a:solidFill>
                 <a:latin typeface="Arial"/>
               </a:rPr>
-              <a:t>Jumlah ODP  429</a:t>
+              <a:t>Jumlah ODP  425</a:t>
             </a:r>
           </a:p>
         </p:txBody>
@@ -22871,7 +22871,7 @@
                 </a:solidFill>
                 <a:latin typeface="Arial"/>
               </a:rPr>
-              <a:t>ODP dikunjungi  84 (19,6%)</a:t>
+              <a:t>ODP dikunjungi  84 (19,8%)</a:t>
             </a:r>
           </a:p>
         </p:txBody>
